--- a/public/fun/pack/pptx/talkpro/발표템플릿프리미엄_06_사업제안_민트플래티넘.pptx
+++ b/public/fun/pack/pptx/talkpro/발표템플릿프리미엄_06_사업제안_민트플래티넘.pptx
@@ -115,12 +115,12 @@
   <p:extLst>
     <p:ext uri="{521415D9-36F7-43E2-AB2F-B90AF26B5E84}">
       <p14:sectionLst xmlns:p14="http://schemas.microsoft.com/office/powerpoint/2010/main">
-        <p14:section name="시작" id="{E7D8E181-7217-4716-971A-15DB457B270B}">
+        <p14:section name="시작" id="{8DF7149B-2EA1-49D1-8A5B-AB528C635F6F}">
           <p14:sldIdLst>
             <p14:sldId id="256"/>
           </p14:sldIdLst>
         </p14:section>
-        <p14:section name="본문" id="{07B6D9CB-8A3B-4DED-A602-302ADEA91D92}">
+        <p14:section name="본문" id="{45F6E220-2287-45AA-8FAA-F1778B23A00A}">
           <p14:sldIdLst>
             <p14:sldId id="257"/>
             <p14:sldId id="258"/>
@@ -131,7 +131,7 @@
             <p14:sldId id="263"/>
           </p14:sldIdLst>
         </p14:section>
-        <p14:section name="마무리" id="{0ED411C2-B8AB-48C8-ADB0-61B24BEAA611}">
+        <p14:section name="마무리" id="{5E5D9A74-9D22-409B-9D4E-48644F50B5BC}">
           <p14:sldIdLst>
             <p14:sldId id="264"/>
           </p14:sldIdLst>
@@ -1960,7 +1960,7 @@
             </a:lvl1pPr>
           </a:lstStyle>
           <a:p>
-            <a:fld id="{C8D29019-E63C-4D3B-A016-1D0C5A2321B8}" type="slidenum">
+            <a:fld id="{9EBAFB3F-CFFC-46E8-8BF6-D0D4D33CEAE6}" type="slidenum">
               <a:rPr lang="en-US"/>
               <a:t>‹#›</a:t>
             </a:fld>
@@ -2683,7 +2683,7 @@
             </a:lvl1pPr>
           </a:lstStyle>
           <a:p>
-            <a:fld id="{E40AE307-CAD4-4734-99DB-AAE22C18A2A5}" type="slidenum">
+            <a:fld id="{194EFE75-E7C3-4B23-A975-883EEB08666B}" type="slidenum">
               <a:rPr lang="en-US"/>
               <a:t>‹#›</a:t>
             </a:fld>
@@ -3364,7 +3364,7 @@
             </a:lvl1pPr>
           </a:lstStyle>
           <a:p>
-            <a:fld id="{4B2D64B5-FCAA-4B49-9B4F-3E0E423DBA8C}" type="slidenum">
+            <a:fld id="{F15958A4-6366-495D-8B1D-CBC05F43C581}" type="slidenum">
               <a:rPr lang="en-US"/>
               <a:t>‹#›</a:t>
             </a:fld>
@@ -4255,7 +4255,7 @@
           <a:p>
             <a:r>
               <a:rPr lang="ko-KR"/>
-              <a:t>0000. 00. 00</a:t>
+              <a:t>날짜 입력</a:t>
             </a:r>
           </a:p>
         </p:txBody>
@@ -4340,7 +4340,7 @@
           <a:bodyPr/>
           <a:lstStyle/>
           <a:p>
-            <a:fld id="{8B9B15CA-D2B5-4C96-9926-35A60D1F9588}" type="slidenum">
+            <a:fld id="{51A1C56D-5A54-462B-9765-78E7667D68C9}" type="slidenum">
               <a:rPr lang="en-US"/>
               <a:t>‹#›</a:t>
             </a:fld>
@@ -5506,7 +5506,7 @@
           <a:bodyPr/>
           <a:lstStyle/>
           <a:p>
-            <a:fld id="{AFC83944-F2F6-4F48-9355-C2737DC01C75}" type="slidenum">
+            <a:fld id="{E007BF5B-D810-48BE-BF6E-BE98670AEF0F}" type="slidenum">
               <a:rPr lang="en-US"/>
               <a:t>‹#›</a:t>
             </a:fld>
@@ -5594,7 +5594,7 @@
           <a:bodyPr/>
           <a:lstStyle/>
           <a:p>
-            <a:fld id="{BDD7D9C6-A4E5-46F9-802D-96C1C13E5FD8}" type="slidenum">
+            <a:fld id="{EC5E23EE-6A3D-4B91-977C-D91B483D3E0A}" type="slidenum">
               <a:rPr lang="en-US"/>
               <a:t>‹#›</a:t>
             </a:fld>
@@ -6540,7 +6540,7 @@
           <a:bodyPr/>
           <a:lstStyle/>
           <a:p>
-            <a:fld id="{D6AF03F7-F3B6-4229-8C0F-8179C9069F8E}" type="slidenum">
+            <a:fld id="{0F523BB0-CDB0-472C-B7FC-0405CEB45C2B}" type="slidenum">
               <a:rPr lang="en-US"/>
               <a:t>‹#›</a:t>
             </a:fld>
@@ -7138,7 +7138,7 @@
           <a:bodyPr/>
           <a:lstStyle/>
           <a:p>
-            <a:fld id="{B2224503-0E86-4EEC-A053-87C7E26C1639}" type="slidenum">
+            <a:fld id="{CCB3C233-52C9-40E0-80BB-3BE621FD6F63}" type="slidenum">
               <a:rPr lang="en-US"/>
               <a:t>‹#›</a:t>
             </a:fld>
@@ -7321,7 +7321,7 @@
           <a:bodyPr/>
           <a:lstStyle/>
           <a:p>
-            <a:fld id="{7FEB3855-759E-443E-BBC4-AC9302E52226}" type="slidenum">
+            <a:fld id="{F8D79FC9-F106-48C0-B7DD-A75DA1DC514B}" type="slidenum">
               <a:rPr lang="en-US"/>
               <a:t>‹#›</a:t>
             </a:fld>
@@ -8385,7 +8385,7 @@
           <a:bodyPr/>
           <a:lstStyle/>
           <a:p>
-            <a:fld id="{205536DF-28D1-412F-80E7-3A2EBD5C78A4}" type="slidenum">
+            <a:fld id="{2AD060F3-CD55-4258-B054-14573BABD6F5}" type="slidenum">
               <a:rPr lang="en-US"/>
               <a:t>‹#›</a:t>
             </a:fld>
